--- a/PPTs/L0 course overview.pptx
+++ b/PPTs/L0 course overview.pptx
@@ -292,7 +292,7 @@
           <a:p>
             <a:fld id="{42A0EB13-15AA-4F17-85B5-7D7BBF18EB40}" type="datetimeFigureOut">
               <a:rPr lang="en-SE" smtClean="0"/>
-              <a:t>09/01/2026</a:t>
+              <a:t>10/07/2026</a:t>
             </a:fld>
             <a:endParaRPr lang="en-SE"/>
           </a:p>
@@ -939,7 +939,7 @@
           <a:p>
             <a:fld id="{FB221443-D73C-634A-A910-7320408C156D}" type="datetimeFigureOut">
               <a:rPr lang="en-US" smtClean="0"/>
-              <a:t>9/1/2026</a:t>
+              <a:t>10/7/2026</a:t>
             </a:fld>
             <a:endParaRPr lang="en-US"/>
           </a:p>
@@ -1109,7 +1109,7 @@
           <a:p>
             <a:fld id="{FB221443-D73C-634A-A910-7320408C156D}" type="datetimeFigureOut">
               <a:rPr lang="en-US" smtClean="0"/>
-              <a:t>9/1/2026</a:t>
+              <a:t>10/7/2026</a:t>
             </a:fld>
             <a:endParaRPr lang="en-US"/>
           </a:p>
@@ -1289,7 +1289,7 @@
           <a:p>
             <a:fld id="{FB221443-D73C-634A-A910-7320408C156D}" type="datetimeFigureOut">
               <a:rPr lang="en-US" smtClean="0"/>
-              <a:t>9/1/2026</a:t>
+              <a:t>10/7/2026</a:t>
             </a:fld>
             <a:endParaRPr lang="en-US"/>
           </a:p>
@@ -1459,7 +1459,7 @@
           <a:p>
             <a:fld id="{FB221443-D73C-634A-A910-7320408C156D}" type="datetimeFigureOut">
               <a:rPr lang="en-US" smtClean="0"/>
-              <a:t>9/1/2026</a:t>
+              <a:t>10/7/2026</a:t>
             </a:fld>
             <a:endParaRPr lang="en-US"/>
           </a:p>
@@ -1705,7 +1705,7 @@
           <a:p>
             <a:fld id="{FB221443-D73C-634A-A910-7320408C156D}" type="datetimeFigureOut">
               <a:rPr lang="en-US" smtClean="0"/>
-              <a:t>9/1/2026</a:t>
+              <a:t>10/7/2026</a:t>
             </a:fld>
             <a:endParaRPr lang="en-US"/>
           </a:p>
@@ -1993,7 +1993,7 @@
           <a:p>
             <a:fld id="{FB221443-D73C-634A-A910-7320408C156D}" type="datetimeFigureOut">
               <a:rPr lang="en-US" smtClean="0"/>
-              <a:t>9/1/2026</a:t>
+              <a:t>10/7/2026</a:t>
             </a:fld>
             <a:endParaRPr lang="en-US"/>
           </a:p>
@@ -2415,7 +2415,7 @@
           <a:p>
             <a:fld id="{FB221443-D73C-634A-A910-7320408C156D}" type="datetimeFigureOut">
               <a:rPr lang="en-US" smtClean="0"/>
-              <a:t>9/1/2026</a:t>
+              <a:t>10/7/2026</a:t>
             </a:fld>
             <a:endParaRPr lang="en-US"/>
           </a:p>
@@ -2533,7 +2533,7 @@
           <a:p>
             <a:fld id="{FB221443-D73C-634A-A910-7320408C156D}" type="datetimeFigureOut">
               <a:rPr lang="en-US" smtClean="0"/>
-              <a:t>9/1/2026</a:t>
+              <a:t>10/7/2026</a:t>
             </a:fld>
             <a:endParaRPr lang="en-US"/>
           </a:p>
@@ -2628,7 +2628,7 @@
           <a:p>
             <a:fld id="{FB221443-D73C-634A-A910-7320408C156D}" type="datetimeFigureOut">
               <a:rPr lang="en-US" smtClean="0"/>
-              <a:t>9/1/2026</a:t>
+              <a:t>10/7/2026</a:t>
             </a:fld>
             <a:endParaRPr lang="en-US"/>
           </a:p>
@@ -2905,7 +2905,7 @@
           <a:p>
             <a:fld id="{FB221443-D73C-634A-A910-7320408C156D}" type="datetimeFigureOut">
               <a:rPr lang="en-US" smtClean="0"/>
-              <a:t>9/1/2026</a:t>
+              <a:t>10/7/2026</a:t>
             </a:fld>
             <a:endParaRPr lang="en-US"/>
           </a:p>
@@ -3158,7 +3158,7 @@
           <a:p>
             <a:fld id="{FB221443-D73C-634A-A910-7320408C156D}" type="datetimeFigureOut">
               <a:rPr lang="en-US" smtClean="0"/>
-              <a:t>9/1/2026</a:t>
+              <a:t>10/7/2026</a:t>
             </a:fld>
             <a:endParaRPr lang="en-US"/>
           </a:p>
@@ -3371,7 +3371,7 @@
           <a:p>
             <a:fld id="{FB221443-D73C-634A-A910-7320408C156D}" type="datetimeFigureOut">
               <a:rPr lang="en-US" smtClean="0"/>
-              <a:t>9/1/2026</a:t>
+              <a:t>10/7/2026</a:t>
             </a:fld>
             <a:endParaRPr lang="en-US"/>
           </a:p>
@@ -4106,8 +4106,12 @@
               <a:t>Office hours: </a:t>
             </a:r>
             <a:r>
+              <a:rPr lang="de-DE" dirty="0"/>
+              <a:t>Fri 8:00 AM--10:00 AM,</a:t>
+            </a:r>
+            <a:r>
               <a:rPr lang="en-US" altLang="zh-CN" dirty="0"/>
-              <a:t>TR 4:05 PM-6:00 PM, </a:t>
+              <a:t> </a:t>
             </a:r>
             <a:r>
               <a:rPr lang="en-US" dirty="0"/>
